--- a/DBTUNING/ch25_ASH샘플링추적/ch25_ASH_샘플링데이터추적.pptx
+++ b/DBTUNING/ch25_ASH샘플링추적/ch25_ASH_샘플링데이터추적.pptx
@@ -746,7 +746,7 @@
           <a:lstStyle/>
           <a:p>
             <a:r>
-              <a:t>CPU 지배형이라는 판정이 섰으니 그 CPU를 실제로 태운 SQL을 지목한다. 상위 두 SQL이 전체 SQL 샘플의 대부분을 차지한다. 여기서도 samples=186은 186번 실행이 아니라 1초 샘플에 186번 수행 중으로 잡힐 만큼 오래 CPU를 점유했다는 뜻이다. 이 부하는 리터럴 하드파싱(WL_01 계열)과 대량 스캔을 섞어 만든 것이라, 9장 ADDM의 Hard Parse Due to Literal Usage 진단과 같은 현상의 앞뒷면이다. 실제 횟수·비용은 V$SQL로 이어 확인한다.</a:t>
+              <a:t>CPU 지배형이라는 판정이 섰으니 그 CPU를 실제로 태운 SQL을 지목한다. 상위 두 SQL이 전체 SQL 샘플의 대부분을 차지한다. 여기서도 samples=186은 186번 실행이 아니라 1초 샘플에 186번 수행 중으로 잡힐 만큼 오래 CPU를 점유했다는 뜻이다. 이 부하는 리터럴 하드파싱(WL_01 계열)과 대량 스캔을 섞어 만든 것이라, ch24 ADDM의 Hard Parse Due to Literal Usage 진단과 같은 현상의 앞뒷면이다. 실제 횟수·비용은 V$SQL로 이어 확인한다.</a:t>
             </a:r>
           </a:p>
         </p:txBody>
@@ -5229,7 +5229,7 @@
                 </a:solidFill>
                 <a:latin typeface="맑은 고딕"/>
               </a:rPr>
-              <a:t>제10장</a:t>
+              <a:t>제ch25</a:t>
             </a:r>
           </a:p>
         </p:txBody>
@@ -7215,7 +7215,7 @@
                 </a:solidFill>
                 <a:latin typeface="맑은 고딕"/>
               </a:rPr>
-              <a:t>•  8·9장과 같은 부하 구간</a:t>
+              <a:t>•  ch22·ch24과 같은 부하 구간</a:t>
             </a:r>
           </a:p>
           <a:p>
@@ -11898,7 +11898,7 @@
                 </a:solidFill>
                 <a:latin typeface="맑은 고딕"/>
               </a:rPr>
-              <a:t>•  AWR(8장): 구간 누적 → DB CPU 지배</a:t>
+              <a:t>•  AWR(ch22): 구간 누적 → DB CPU 지배</a:t>
             </a:r>
           </a:p>
           <a:p>
@@ -11914,7 +11914,7 @@
                 </a:solidFill>
                 <a:latin typeface="맑은 고딕"/>
               </a:rPr>
-              <a:t>•  ADDM(9장): 자동 진단 → 리터럴 하드파싱</a:t>
+              <a:t>•  ADDM(ch24): 자동 진단 → 리터럴 하드파싱</a:t>
             </a:r>
           </a:p>
           <a:p>
@@ -11930,7 +11930,7 @@
                 </a:solidFill>
                 <a:latin typeface="맑은 고딕"/>
               </a:rPr>
-              <a:t>•  ASH(10장): 1초 샘플 → ON CPU 90.7%</a:t>
+              <a:t>•  ASH(ch25): 1초 샘플 → ON CPU 90.7%</a:t>
             </a:r>
           </a:p>
           <a:p>

--- a/DBTUNING/ch25_ASH샘플링추적/ch25_ASH_샘플링데이터추적.pptx
+++ b/DBTUNING/ch25_ASH샘플링추적/ch25_ASH_샘플링데이터추적.pptx
@@ -5229,7 +5229,7 @@
                 </a:solidFill>
                 <a:latin typeface="맑은 고딕"/>
               </a:rPr>
-              <a:t>제ch25</a:t>
+              <a:t>ch25</a:t>
             </a:r>
           </a:p>
         </p:txBody>

--- a/DBTUNING/ch25_ASH샘플링추적/ch25_ASH_샘플링데이터추적.pptx
+++ b/DBTUNING/ch25_ASH샘플링추적/ch25_ASH_샘플링데이터추적.pptx
@@ -5852,7 +5852,7 @@
                 </a:solidFill>
                 <a:latin typeface="맑은 고딕"/>
               </a:rPr>
-              <a:t>10.4</a:t>
+              <a:t>25.4</a:t>
             </a:r>
           </a:p>
         </p:txBody>
@@ -7097,7 +7097,7 @@
                 </a:solidFill>
                 <a:latin typeface="맑은 고딕"/>
               </a:rPr>
-              <a:t>10.5</a:t>
+              <a:t>25.5</a:t>
             </a:r>
           </a:p>
         </p:txBody>
@@ -9613,7 +9613,7 @@
                 </a:solidFill>
                 <a:latin typeface="맑은 고딕"/>
               </a:rPr>
-              <a:t>10.6</a:t>
+              <a:t>25.6</a:t>
             </a:r>
           </a:p>
         </p:txBody>
@@ -10565,7 +10565,7 @@
                 </a:solidFill>
                 <a:latin typeface="맑은 고딕"/>
               </a:rPr>
-              <a:t>10.7</a:t>
+              <a:t>25.7</a:t>
             </a:r>
           </a:p>
         </p:txBody>
@@ -11517,7 +11517,7 @@
                 </a:solidFill>
                 <a:latin typeface="맑은 고딕"/>
               </a:rPr>
-              <a:t>10.8</a:t>
+              <a:t>25.8</a:t>
             </a:r>
           </a:p>
         </p:txBody>
@@ -12082,7 +12082,7 @@
                 </a:solidFill>
                 <a:latin typeface="맑은 고딕"/>
               </a:rPr>
-              <a:t>•  10.2  ASH란 무엇인가 — 샘플링의 원리</a:t>
+              <a:t>•  25.2  ASH란 무엇인가 — 샘플링의 원리</a:t>
             </a:r>
           </a:p>
           <a:p>
@@ -12098,7 +12098,7 @@
                 </a:solidFill>
                 <a:latin typeface="맑은 고딕"/>
               </a:rPr>
-              <a:t>•  10.3  ASH가 필요한 순간 — 짧은 스파이크</a:t>
+              <a:t>•  25.3  ASH가 필요한 순간 — 짧은 스파이크</a:t>
             </a:r>
           </a:p>
           <a:p>
@@ -12114,7 +12114,7 @@
                 </a:solidFill>
                 <a:latin typeface="맑은 고딕"/>
               </a:rPr>
-              <a:t>•  10.4  ASH 보고서 생성 — ashrpt.sql</a:t>
+              <a:t>•  25.4  ASH 보고서 생성 — ashrpt.sql</a:t>
             </a:r>
           </a:p>
           <a:p>
@@ -12130,7 +12130,7 @@
                 </a:solidFill>
                 <a:latin typeface="맑은 고딕"/>
               </a:rPr>
-              <a:t>•  10.5  실측 — 부하 구간 10분을 ASH로 재구성</a:t>
+              <a:t>•  25.5  실측 — 부하 구간 10분을 ASH로 재구성</a:t>
             </a:r>
           </a:p>
           <a:p>
@@ -12146,7 +12146,7 @@
                 </a:solidFill>
                 <a:latin typeface="맑은 고딕"/>
               </a:rPr>
-              <a:t>•  10.6  세션 단위 추적 — 시간순 재구성</a:t>
+              <a:t>•  25.6  세션 단위 추적 — 시간순 재구성</a:t>
             </a:r>
           </a:p>
           <a:p>
@@ -12162,7 +12162,7 @@
                 </a:solidFill>
                 <a:latin typeface="맑은 고딕"/>
               </a:rPr>
-              <a:t>•  10.7  DBA_HIST_ACTIVE_SESS_HISTORY — 보존 구간</a:t>
+              <a:t>•  25.7  DBA_HIST_ACTIVE_SESS_HISTORY — 보존 구간</a:t>
             </a:r>
           </a:p>
           <a:p>
@@ -12178,7 +12178,7 @@
                 </a:solidFill>
                 <a:latin typeface="맑은 고딕"/>
               </a:rPr>
-              <a:t>•  10.8  세 도구가 같은 부하를 본다 — AWR·ADDM·ASH</a:t>
+              <a:t>•  25.8  세 도구가 같은 부하를 본다 — AWR·ADDM·ASH</a:t>
             </a:r>
           </a:p>
           <a:p>
@@ -12194,7 +12194,7 @@
                 </a:solidFill>
                 <a:latin typeface="맑은 고딕"/>
               </a:rPr>
-              <a:t>•  10.9  관리 팩 라이선스와 대안 경로</a:t>
+              <a:t>•  25.9  관리 팩 라이선스와 대안 경로</a:t>
             </a:r>
           </a:p>
         </p:txBody>
@@ -12291,7 +12291,7 @@
                 </a:solidFill>
                 <a:latin typeface="맑은 고딕"/>
               </a:rPr>
-              <a:t>10.9</a:t>
+              <a:t>25.9</a:t>
             </a:r>
           </a:p>
         </p:txBody>
@@ -13907,7 +13907,7 @@
                 </a:solidFill>
                 <a:latin typeface="맑은 고딕"/>
               </a:rPr>
-              <a:t>10.2</a:t>
+              <a:t>25.2</a:t>
             </a:r>
           </a:p>
         </p:txBody>
@@ -15366,7 +15366,7 @@
                 </a:solidFill>
                 <a:latin typeface="맑은 고딕"/>
               </a:rPr>
-              <a:t>10.3</a:t>
+              <a:t>25.3</a:t>
             </a:r>
           </a:p>
         </p:txBody>
